--- a/images/banner.pptx
+++ b/images/banner.pptx
@@ -244,7 +244,7 @@
           <a:p>
             <a:fld id="{76AD145D-5474-BC45-B8BA-D465C7BF17A8}" type="datetimeFigureOut">
               <a:rPr lang="en-US" smtClean="0"/>
-              <a:t>3/23/21</a:t>
+              <a:t>3/30/21</a:t>
             </a:fld>
             <a:endParaRPr lang="en-US"/>
           </a:p>
@@ -414,7 +414,7 @@
           <a:p>
             <a:fld id="{76AD145D-5474-BC45-B8BA-D465C7BF17A8}" type="datetimeFigureOut">
               <a:rPr lang="en-US" smtClean="0"/>
-              <a:t>3/23/21</a:t>
+              <a:t>3/30/21</a:t>
             </a:fld>
             <a:endParaRPr lang="en-US"/>
           </a:p>
@@ -594,7 +594,7 @@
           <a:p>
             <a:fld id="{76AD145D-5474-BC45-B8BA-D465C7BF17A8}" type="datetimeFigureOut">
               <a:rPr lang="en-US" smtClean="0"/>
-              <a:t>3/23/21</a:t>
+              <a:t>3/30/21</a:t>
             </a:fld>
             <a:endParaRPr lang="en-US"/>
           </a:p>
@@ -764,7 +764,7 @@
           <a:p>
             <a:fld id="{76AD145D-5474-BC45-B8BA-D465C7BF17A8}" type="datetimeFigureOut">
               <a:rPr lang="en-US" smtClean="0"/>
-              <a:t>3/23/21</a:t>
+              <a:t>3/30/21</a:t>
             </a:fld>
             <a:endParaRPr lang="en-US"/>
           </a:p>
@@ -1010,7 +1010,7 @@
           <a:p>
             <a:fld id="{76AD145D-5474-BC45-B8BA-D465C7BF17A8}" type="datetimeFigureOut">
               <a:rPr lang="en-US" smtClean="0"/>
-              <a:t>3/23/21</a:t>
+              <a:t>3/30/21</a:t>
             </a:fld>
             <a:endParaRPr lang="en-US"/>
           </a:p>
@@ -1242,7 +1242,7 @@
           <a:p>
             <a:fld id="{76AD145D-5474-BC45-B8BA-D465C7BF17A8}" type="datetimeFigureOut">
               <a:rPr lang="en-US" smtClean="0"/>
-              <a:t>3/23/21</a:t>
+              <a:t>3/30/21</a:t>
             </a:fld>
             <a:endParaRPr lang="en-US"/>
           </a:p>
@@ -1609,7 +1609,7 @@
           <a:p>
             <a:fld id="{76AD145D-5474-BC45-B8BA-D465C7BF17A8}" type="datetimeFigureOut">
               <a:rPr lang="en-US" smtClean="0"/>
-              <a:t>3/23/21</a:t>
+              <a:t>3/30/21</a:t>
             </a:fld>
             <a:endParaRPr lang="en-US"/>
           </a:p>
@@ -1727,7 +1727,7 @@
           <a:p>
             <a:fld id="{76AD145D-5474-BC45-B8BA-D465C7BF17A8}" type="datetimeFigureOut">
               <a:rPr lang="en-US" smtClean="0"/>
-              <a:t>3/23/21</a:t>
+              <a:t>3/30/21</a:t>
             </a:fld>
             <a:endParaRPr lang="en-US"/>
           </a:p>
@@ -1822,7 +1822,7 @@
           <a:p>
             <a:fld id="{76AD145D-5474-BC45-B8BA-D465C7BF17A8}" type="datetimeFigureOut">
               <a:rPr lang="en-US" smtClean="0"/>
-              <a:t>3/23/21</a:t>
+              <a:t>3/30/21</a:t>
             </a:fld>
             <a:endParaRPr lang="en-US"/>
           </a:p>
@@ -2099,7 +2099,7 @@
           <a:p>
             <a:fld id="{76AD145D-5474-BC45-B8BA-D465C7BF17A8}" type="datetimeFigureOut">
               <a:rPr lang="en-US" smtClean="0"/>
-              <a:t>3/23/21</a:t>
+              <a:t>3/30/21</a:t>
             </a:fld>
             <a:endParaRPr lang="en-US"/>
           </a:p>
@@ -2352,7 +2352,7 @@
           <a:p>
             <a:fld id="{76AD145D-5474-BC45-B8BA-D465C7BF17A8}" type="datetimeFigureOut">
               <a:rPr lang="en-US" smtClean="0"/>
-              <a:t>3/23/21</a:t>
+              <a:t>3/30/21</a:t>
             </a:fld>
             <a:endParaRPr lang="en-US"/>
           </a:p>
@@ -2565,7 +2565,7 @@
           <a:p>
             <a:fld id="{76AD145D-5474-BC45-B8BA-D465C7BF17A8}" type="datetimeFigureOut">
               <a:rPr lang="en-US" smtClean="0"/>
-              <a:t>3/23/21</a:t>
+              <a:t>3/30/21</a:t>
             </a:fld>
             <a:endParaRPr lang="en-US"/>
           </a:p>
@@ -3304,7 +3304,7 @@
         <p:spPr>
           <a:xfrm>
             <a:off x="3304571" y="1836191"/>
-            <a:ext cx="1279004" cy="45719"/>
+            <a:ext cx="1188720" cy="45719"/>
           </a:xfrm>
           <a:prstGeom prst="rect">
             <a:avLst/>
@@ -3367,7 +3367,7 @@
           <a:lstStyle/>
           <a:p>
             <a:r>
-              <a:rPr lang="zh-CN" altLang="en-US" sz="2000" dirty="0" smtClean="0">
+              <a:rPr lang="en-US" sz="2000" dirty="0" smtClean="0">
                 <a:solidFill>
                   <a:schemeClr val="bg1"/>
                 </a:solidFill>
@@ -3375,8 +3375,357 @@
                 <a:ea typeface="Hiragino Mincho Pro W3" charset="-128"/>
                 <a:cs typeface="Hiragino Mincho Pro W3" charset="-128"/>
               </a:rPr>
-              <a:t>科</a:t>
-            </a:r>
+              <a:t>EST. 1993</a:t>
+            </a:r>
+            <a:endParaRPr lang="en-US" sz="2000" dirty="0">
+              <a:solidFill>
+                <a:schemeClr val="bg1"/>
+              </a:solidFill>
+              <a:latin typeface="Hiragino Mincho Pro W3" charset="-128"/>
+              <a:ea typeface="Hiragino Mincho Pro W3" charset="-128"/>
+              <a:cs typeface="Hiragino Mincho Pro W3" charset="-128"/>
+            </a:endParaRPr>
+          </a:p>
+        </p:txBody>
+      </p:sp>
+      <p:pic>
+        <p:nvPicPr>
+          <p:cNvPr id="9" name="Picture 8"/>
+          <p:cNvPicPr>
+            <a:picLocks noChangeAspect="1"/>
+          </p:cNvPicPr>
+          <p:nvPr/>
+        </p:nvPicPr>
+        <p:blipFill>
+          <a:blip r:embed="rId2"/>
+          <a:stretch>
+            <a:fillRect/>
+          </a:stretch>
+        </p:blipFill>
+        <p:spPr>
+          <a:xfrm>
+            <a:off x="0" y="4127500"/>
+            <a:ext cx="11899900" cy="2730500"/>
+          </a:xfrm>
+          <a:prstGeom prst="rect">
+            <a:avLst/>
+          </a:prstGeom>
+        </p:spPr>
+      </p:pic>
+      <p:pic>
+        <p:nvPicPr>
+          <p:cNvPr id="14" name="Picture 13"/>
+          <p:cNvPicPr>
+            <a:picLocks noChangeAspect="1"/>
+          </p:cNvPicPr>
+          <p:nvPr/>
+        </p:nvPicPr>
+        <p:blipFill rotWithShape="1">
+          <a:blip r:embed="rId3">
+            <a:grayscl/>
+          </a:blip>
+          <a:srcRect t="42441" r="2973" b="9254"/>
+          <a:stretch/>
+        </p:blipFill>
+        <p:spPr>
+          <a:xfrm>
+            <a:off x="2992582" y="4141460"/>
+            <a:ext cx="8907318" cy="2716540"/>
+          </a:xfrm>
+          <a:prstGeom prst="rect">
+            <a:avLst/>
+          </a:prstGeom>
+        </p:spPr>
+      </p:pic>
+      <p:sp>
+        <p:nvSpPr>
+          <p:cNvPr id="15" name="Rectangle 14"/>
+          <p:cNvSpPr/>
+          <p:nvPr/>
+        </p:nvSpPr>
+        <p:spPr>
+          <a:xfrm>
+            <a:off x="2992582" y="4141460"/>
+            <a:ext cx="8907318" cy="2716540"/>
+          </a:xfrm>
+          <a:prstGeom prst="rect">
+            <a:avLst/>
+          </a:prstGeom>
+          <a:solidFill>
+            <a:srgbClr val="000000">
+              <a:alpha val="27843"/>
+            </a:srgbClr>
+          </a:solidFill>
+          <a:ln>
+            <a:noFill/>
+          </a:ln>
+        </p:spPr>
+        <p:style>
+          <a:lnRef idx="2">
+            <a:schemeClr val="accent1">
+              <a:shade val="50000"/>
+            </a:schemeClr>
+          </a:lnRef>
+          <a:fillRef idx="1">
+            <a:schemeClr val="accent1"/>
+          </a:fillRef>
+          <a:effectRef idx="0">
+            <a:schemeClr val="accent1"/>
+          </a:effectRef>
+          <a:fontRef idx="minor">
+            <a:schemeClr val="lt1"/>
+          </a:fontRef>
+        </p:style>
+        <p:txBody>
+          <a:bodyPr rtlCol="0" anchor="ctr"/>
+          <a:lstStyle/>
+          <a:p>
+            <a:pPr algn="ctr"/>
+            <a:endParaRPr lang="en-US"/>
+          </a:p>
+        </p:txBody>
+      </p:sp>
+      <p:pic>
+        <p:nvPicPr>
+          <p:cNvPr id="16" name="Picture 15"/>
+          <p:cNvPicPr>
+            <a:picLocks noChangeAspect="1"/>
+          </p:cNvPicPr>
+          <p:nvPr/>
+        </p:nvPicPr>
+        <p:blipFill>
+          <a:blip r:embed="rId4">
+            <a:extLst>
+              <a:ext uri="{BEBA8EAE-BF5A-486C-A8C5-ECC9F3942E4B}">
+                <a14:imgProps xmlns:a14="http://schemas.microsoft.com/office/drawing/2010/main">
+                  <a14:imgLayer r:embed="rId5">
+                    <a14:imgEffect>
+                      <a14:brightnessContrast bright="40000" contrast="40000"/>
+                    </a14:imgEffect>
+                  </a14:imgLayer>
+                </a14:imgProps>
+              </a:ext>
+            </a:extLst>
+          </a:blip>
+          <a:stretch>
+            <a:fillRect/>
+          </a:stretch>
+        </p:blipFill>
+        <p:spPr>
+          <a:xfrm>
+            <a:off x="10208871" y="6406588"/>
+            <a:ext cx="1540559" cy="255733"/>
+          </a:xfrm>
+          <a:prstGeom prst="rect">
+            <a:avLst/>
+          </a:prstGeom>
+        </p:spPr>
+      </p:pic>
+      <p:sp>
+        <p:nvSpPr>
+          <p:cNvPr id="17" name="TextBox 16"/>
+          <p:cNvSpPr txBox="1"/>
+          <p:nvPr/>
+        </p:nvSpPr>
+        <p:spPr>
+          <a:xfrm>
+            <a:off x="3200399" y="4750050"/>
+            <a:ext cx="4027990" cy="830997"/>
+          </a:xfrm>
+          <a:prstGeom prst="rect">
+            <a:avLst/>
+          </a:prstGeom>
+          <a:noFill/>
+          <a:ln>
+            <a:noFill/>
+          </a:ln>
+        </p:spPr>
+        <p:txBody>
+          <a:bodyPr wrap="square" rtlCol="0">
+            <a:spAutoFit/>
+          </a:bodyPr>
+          <a:lstStyle/>
+          <a:p>
+            <a:r>
+              <a:rPr lang="zh-CN" altLang="en-US" sz="2400" dirty="0" smtClean="0">
+                <a:solidFill>
+                  <a:schemeClr val="bg1"/>
+                </a:solidFill>
+                <a:latin typeface="Hiragino Mincho Pro W3" charset="-128"/>
+                <a:ea typeface="Hiragino Mincho Pro W3" charset="-128"/>
+                <a:cs typeface="Hiragino Mincho Pro W3" charset="-128"/>
+              </a:rPr>
+              <a:t>給</a:t>
+            </a:r>
+            <a:r>
+              <a:rPr lang="en-US" altLang="zh-CN" sz="2400" dirty="0" smtClean="0">
+                <a:solidFill>
+                  <a:schemeClr val="bg1"/>
+                </a:solidFill>
+                <a:latin typeface="Hiragino Mincho Pro W3" charset="-128"/>
+                <a:ea typeface="Hiragino Mincho Pro W3" charset="-128"/>
+                <a:cs typeface="Hiragino Mincho Pro W3" charset="-128"/>
+              </a:rPr>
+              <a:t> </a:t>
+            </a:r>
+            <a:r>
+              <a:rPr lang="zh-CN" altLang="en-US" sz="2400" dirty="0" smtClean="0">
+                <a:solidFill>
+                  <a:schemeClr val="bg1"/>
+                </a:solidFill>
+                <a:latin typeface="Hiragino Mincho Pro W3" charset="-128"/>
+                <a:ea typeface="Hiragino Mincho Pro W3" charset="-128"/>
+                <a:cs typeface="Hiragino Mincho Pro W3" charset="-128"/>
+              </a:rPr>
+              <a:t>科學</a:t>
+            </a:r>
+            <a:r>
+              <a:rPr lang="en-US" altLang="zh-CN" sz="2400" dirty="0" smtClean="0">
+                <a:solidFill>
+                  <a:schemeClr val="bg1"/>
+                </a:solidFill>
+                <a:latin typeface="Hiragino Mincho Pro W3" charset="-128"/>
+                <a:ea typeface="Hiragino Mincho Pro W3" charset="-128"/>
+                <a:cs typeface="Hiragino Mincho Pro W3" charset="-128"/>
+              </a:rPr>
+              <a:t> </a:t>
+            </a:r>
+            <a:r>
+              <a:rPr lang="zh-CN" altLang="en-US" sz="2400" dirty="0" smtClean="0">
+                <a:solidFill>
+                  <a:schemeClr val="bg1"/>
+                </a:solidFill>
+                <a:latin typeface="Hiragino Mincho Pro W3" charset="-128"/>
+                <a:ea typeface="Hiragino Mincho Pro W3" charset="-128"/>
+                <a:cs typeface="Hiragino Mincho Pro W3" charset="-128"/>
+              </a:rPr>
+              <a:t>以生命</a:t>
+            </a:r>
+            <a:endParaRPr lang="en-US" altLang="zh-CN" sz="2400" dirty="0" smtClean="0">
+              <a:solidFill>
+                <a:schemeClr val="bg1"/>
+              </a:solidFill>
+              <a:latin typeface="Hiragino Mincho Pro W3" charset="-128"/>
+              <a:ea typeface="Hiragino Mincho Pro W3" charset="-128"/>
+              <a:cs typeface="Hiragino Mincho Pro W3" charset="-128"/>
+            </a:endParaRPr>
+          </a:p>
+          <a:p>
+            <a:r>
+              <a:rPr lang="zh-CN" altLang="en-US" sz="2400" dirty="0" smtClean="0">
+                <a:solidFill>
+                  <a:schemeClr val="bg1"/>
+                </a:solidFill>
+                <a:latin typeface="Hiragino Mincho Pro W3" charset="-128"/>
+                <a:ea typeface="Hiragino Mincho Pro W3" charset="-128"/>
+                <a:cs typeface="Hiragino Mincho Pro W3" charset="-128"/>
+              </a:rPr>
+              <a:t>歲月</a:t>
+            </a:r>
+            <a:r>
+              <a:rPr lang="en-US" altLang="zh-CN" sz="2400" dirty="0" smtClean="0">
+                <a:solidFill>
+                  <a:schemeClr val="bg1"/>
+                </a:solidFill>
+                <a:latin typeface="Hiragino Mincho Pro W3" charset="-128"/>
+                <a:ea typeface="Hiragino Mincho Pro W3" charset="-128"/>
+                <a:cs typeface="Hiragino Mincho Pro W3" charset="-128"/>
+              </a:rPr>
+              <a:t> </a:t>
+            </a:r>
+            <a:r>
+              <a:rPr lang="zh-CN" altLang="en-US" sz="2400" dirty="0" smtClean="0">
+                <a:solidFill>
+                  <a:schemeClr val="bg1"/>
+                </a:solidFill>
+                <a:latin typeface="Hiragino Mincho Pro W3" charset="-128"/>
+                <a:ea typeface="Hiragino Mincho Pro W3" charset="-128"/>
+                <a:cs typeface="Hiragino Mincho Pro W3" charset="-128"/>
+              </a:rPr>
+              <a:t>以文明</a:t>
+            </a:r>
+            <a:endParaRPr lang="en-US" sz="2400" dirty="0">
+              <a:solidFill>
+                <a:schemeClr val="bg1"/>
+              </a:solidFill>
+              <a:latin typeface="Hiragino Mincho Pro W3" charset="-128"/>
+              <a:ea typeface="Hiragino Mincho Pro W3" charset="-128"/>
+              <a:cs typeface="Hiragino Mincho Pro W3" charset="-128"/>
+            </a:endParaRPr>
+          </a:p>
+        </p:txBody>
+      </p:sp>
+      <p:sp>
+        <p:nvSpPr>
+          <p:cNvPr id="18" name="Rectangle 17"/>
+          <p:cNvSpPr/>
+          <p:nvPr/>
+        </p:nvSpPr>
+        <p:spPr>
+          <a:xfrm>
+            <a:off x="3304571" y="5783605"/>
+            <a:ext cx="1188720" cy="45719"/>
+          </a:xfrm>
+          <a:prstGeom prst="rect">
+            <a:avLst/>
+          </a:prstGeom>
+          <a:solidFill>
+            <a:srgbClr val="FF9819"/>
+          </a:solidFill>
+          <a:ln>
+            <a:noFill/>
+          </a:ln>
+        </p:spPr>
+        <p:style>
+          <a:lnRef idx="2">
+            <a:schemeClr val="accent1">
+              <a:shade val="50000"/>
+            </a:schemeClr>
+          </a:lnRef>
+          <a:fillRef idx="1">
+            <a:schemeClr val="accent1"/>
+          </a:fillRef>
+          <a:effectRef idx="0">
+            <a:schemeClr val="accent1"/>
+          </a:effectRef>
+          <a:fontRef idx="minor">
+            <a:schemeClr val="lt1"/>
+          </a:fontRef>
+        </p:style>
+        <p:txBody>
+          <a:bodyPr rtlCol="0" anchor="ctr"/>
+          <a:lstStyle/>
+          <a:p>
+            <a:pPr algn="ctr"/>
+            <a:endParaRPr lang="en-US"/>
+          </a:p>
+        </p:txBody>
+      </p:sp>
+      <p:sp>
+        <p:nvSpPr>
+          <p:cNvPr id="19" name="TextBox 18"/>
+          <p:cNvSpPr txBox="1"/>
+          <p:nvPr/>
+        </p:nvSpPr>
+        <p:spPr>
+          <a:xfrm>
+            <a:off x="3200399" y="6006478"/>
+            <a:ext cx="2760563" cy="400110"/>
+          </a:xfrm>
+          <a:prstGeom prst="rect">
+            <a:avLst/>
+          </a:prstGeom>
+          <a:noFill/>
+          <a:ln>
+            <a:noFill/>
+          </a:ln>
+        </p:spPr>
+        <p:txBody>
+          <a:bodyPr wrap="square" rtlCol="0">
+            <a:spAutoFit/>
+          </a:bodyPr>
+          <a:lstStyle/>
+          <a:p>
             <a:r>
               <a:rPr lang="en-US" altLang="zh-CN" sz="2000" dirty="0" smtClean="0">
                 <a:solidFill>
@@ -3386,62 +3735,7 @@
                 <a:ea typeface="Hiragino Mincho Pro W3" charset="-128"/>
                 <a:cs typeface="Hiragino Mincho Pro W3" charset="-128"/>
               </a:rPr>
-              <a:t>/</a:t>
-            </a:r>
-            <a:r>
-              <a:rPr lang="zh-CN" altLang="en-US" sz="2000" dirty="0" smtClean="0">
-                <a:solidFill>
-                  <a:schemeClr val="bg1"/>
-                </a:solidFill>
-                <a:latin typeface="Hiragino Mincho Pro W3" charset="-128"/>
-                <a:ea typeface="Hiragino Mincho Pro W3" charset="-128"/>
-                <a:cs typeface="Hiragino Mincho Pro W3" charset="-128"/>
-              </a:rPr>
-              <a:t>学</a:t>
-            </a:r>
-            <a:r>
-              <a:rPr lang="en-US" altLang="zh-CN" sz="2000" dirty="0" smtClean="0">
-                <a:solidFill>
-                  <a:schemeClr val="bg1"/>
-                </a:solidFill>
-                <a:latin typeface="Hiragino Mincho Pro W3" charset="-128"/>
-                <a:ea typeface="Hiragino Mincho Pro W3" charset="-128"/>
-                <a:cs typeface="Hiragino Mincho Pro W3" charset="-128"/>
-              </a:rPr>
-              <a:t>/</a:t>
-            </a:r>
-            <a:r>
-              <a:rPr lang="zh-CN" altLang="en-US" sz="2000" dirty="0" smtClean="0">
-                <a:solidFill>
-                  <a:schemeClr val="bg1"/>
-                </a:solidFill>
-                <a:latin typeface="Hiragino Mincho Pro W3" charset="-128"/>
-                <a:ea typeface="Hiragino Mincho Pro W3" charset="-128"/>
-                <a:cs typeface="Hiragino Mincho Pro W3" charset="-128"/>
-              </a:rPr>
-              <a:t>艺</a:t>
-            </a:r>
-            <a:r>
-              <a:rPr lang="en-US" altLang="zh-CN" sz="2000" dirty="0" smtClean="0">
-                <a:solidFill>
-                  <a:schemeClr val="bg1"/>
-                </a:solidFill>
-                <a:latin typeface="Hiragino Mincho Pro W3" charset="-128"/>
-                <a:ea typeface="Hiragino Mincho Pro W3" charset="-128"/>
-                <a:cs typeface="Hiragino Mincho Pro W3" charset="-128"/>
-              </a:rPr>
-              <a:t>/</a:t>
-            </a:r>
-            <a:r>
-              <a:rPr lang="zh-CN" altLang="en-US" sz="2000" dirty="0" smtClean="0">
-                <a:solidFill>
-                  <a:schemeClr val="bg1"/>
-                </a:solidFill>
-                <a:latin typeface="Hiragino Mincho Pro W3" charset="-128"/>
-                <a:ea typeface="Hiragino Mincho Pro W3" charset="-128"/>
-                <a:cs typeface="Hiragino Mincho Pro W3" charset="-128"/>
-              </a:rPr>
-              <a:t>术</a:t>
+              <a:t>EST. 1993</a:t>
             </a:r>
             <a:endParaRPr lang="en-US" sz="2000" dirty="0">
               <a:solidFill>
